--- a/Day4/4-paev-andmetarkus-esitlus.pptx
+++ b/Day4/4-paev-andmetarkus-esitlus.pptx
@@ -42,15 +42,17 @@
       <p:font typeface="Inter" panose="020B0604020202020204" charset="0"/>
       <p:regular r:id="rId27"/>
       <p:bold r:id="rId28"/>
+      <p:italic r:id="rId29"/>
+      <p:boldItalic r:id="rId30"/>
     </p:embeddedFont>
     <p:embeddedFont>
       <p:font typeface="Inter Bold" panose="020B0604020202020204" charset="0"/>
-      <p:bold r:id="rId29"/>
+      <p:bold r:id="rId31"/>
     </p:embeddedFont>
     <p:embeddedFont>
       <p:font typeface="Poppins SemiBold" panose="00000700000000000000" pitchFamily="2" charset="0"/>
-      <p:bold r:id="rId30"/>
-      <p:boldItalic r:id="rId31"/>
+      <p:bold r:id="rId32"/>
+      <p:boldItalic r:id="rId33"/>
     </p:embeddedFont>
   </p:embeddedFontLst>
   <p:defaultTextStyle>
@@ -159,12 +161,20 @@
 </p:presentation>
 </file>
 
+<file path=ppt/revisionInfo.xml><?xml version="1.0" encoding="utf-8"?>
+<p1510:revInfo xmlns:a="http://schemas.openxmlformats.org/drawingml/2006/main" xmlns:r="http://schemas.openxmlformats.org/officeDocument/2006/relationships" xmlns:p1510="http://schemas.microsoft.com/office/powerpoint/2015/10/main">
+  <p1510:revLst>
+    <p1510:client id="{9A698C26-2378-4634-9B98-B1EE96FBFB68}" v="2" dt="2026-04-01T15:02:11.777"/>
+  </p1510:revLst>
+</p1510:revInfo>
+</file>
+
 <file path=ppt/changesInfos/changesInfo1.xml><?xml version="1.0" encoding="utf-8"?>
 <pc:chgInfo xmlns:a="http://schemas.openxmlformats.org/drawingml/2006/main" xmlns:r="http://schemas.openxmlformats.org/officeDocument/2006/relationships" xmlns:ac="http://schemas.microsoft.com/office/drawing/2013/main/command" xmlns:pc="http://schemas.microsoft.com/office/powerpoint/2013/main/command">
   <pc:docChgLst>
     <pc:chgData name="Virve Räni" userId="161a7437-7ef4-49ec-91bf-54882f313dfe" providerId="ADAL" clId="{6D754EED-65AA-4A21-B175-6769012CF487}"/>
     <pc:docChg chg="delSld modSld">
-      <pc:chgData name="Virve Räni" userId="161a7437-7ef4-49ec-91bf-54882f313dfe" providerId="ADAL" clId="{6D754EED-65AA-4A21-B175-6769012CF487}" dt="2026-03-16T10:29:09.482" v="1" actId="20577"/>
+      <pc:chgData name="Virve Räni" userId="161a7437-7ef4-49ec-91bf-54882f313dfe" providerId="ADAL" clId="{6D754EED-65AA-4A21-B175-6769012CF487}" dt="2026-04-01T15:02:11.776" v="3" actId="12"/>
       <pc:docMkLst>
         <pc:docMk/>
       </pc:docMkLst>
@@ -183,12 +193,20 @@
           </ac:spMkLst>
         </pc:spChg>
       </pc:sldChg>
-      <pc:sldChg chg="del">
-        <pc:chgData name="Virve Räni" userId="161a7437-7ef4-49ec-91bf-54882f313dfe" providerId="ADAL" clId="{6D754EED-65AA-4A21-B175-6769012CF487}" dt="2026-03-16T10:28:10.325" v="0" actId="47"/>
+      <pc:sldChg chg="modSp">
+        <pc:chgData name="Virve Räni" userId="161a7437-7ef4-49ec-91bf-54882f313dfe" providerId="ADAL" clId="{6D754EED-65AA-4A21-B175-6769012CF487}" dt="2026-04-01T15:02:11.776" v="3" actId="12"/>
         <pc:sldMkLst>
           <pc:docMk/>
-          <pc:sldMk cId="2014094008" sldId="603"/>
+          <pc:sldMk cId="4185195063" sldId="590"/>
         </pc:sldMkLst>
+        <pc:spChg chg="mod">
+          <ac:chgData name="Virve Räni" userId="161a7437-7ef4-49ec-91bf-54882f313dfe" providerId="ADAL" clId="{6D754EED-65AA-4A21-B175-6769012CF487}" dt="2026-04-01T15:02:11.776" v="3" actId="12"/>
+          <ac:spMkLst>
+            <pc:docMk/>
+            <pc:sldMk cId="4185195063" sldId="590"/>
+            <ac:spMk id="4" creationId="{6B98CB17-1EB8-3F89-A7E4-ED297E3825C0}"/>
+          </ac:spMkLst>
+        </pc:spChg>
       </pc:sldChg>
     </pc:docChg>
   </pc:docChgLst>
@@ -289,7 +307,7 @@
           <a:p>
             <a:fld id="{F9D2AD6E-DEDD-49A0-A4BE-7A081A9112DA}" type="datetimeFigureOut">
               <a:rPr lang="en-US" smtClean="0"/>
-              <a:t>3/16/2026</a:t>
+              <a:t>4/1/2026</a:t>
             </a:fld>
             <a:endParaRPr lang="en-US"/>
           </a:p>
@@ -465,7 +483,7 @@
           </a:lstStyle>
           <a:p>
             <a:fld id="{2AF9C1A6-4321-41FA-B001-4140F0E2457F}" type="datetimeFigureOut">
-              <a:t>16.03.2026</a:t>
+              <a:t>01.04.2026</a:t>
             </a:fld>
             <a:endParaRPr lang="en-US"/>
           </a:p>
@@ -857,10 +875,10 @@
           <p:nvPr userDrawn="1"/>
         </p:nvPicPr>
         <p:blipFill>
-          <a:blip r:embed="rId2">
+          <a:blip>
             <a:extLst>
               <a:ext uri="{96DAC541-7B7A-43D3-8B79-37D633B846F1}">
-                <asvg:svgBlip xmlns:asvg="http://schemas.microsoft.com/office/drawing/2016/SVG/main" r:embed="rId3"/>
+                <asvg:svgBlip xmlns:asvg="http://schemas.microsoft.com/office/drawing/2016/SVG/main" r:embed="rId2"/>
               </a:ext>
             </a:extLst>
           </a:blip>
@@ -10418,10 +10436,10 @@
             <a:ext cx="810000" cy="320400"/>
           </a:xfrm>
           <a:blipFill>
-            <a:blip r:embed="rId2">
+            <a:blip>
               <a:extLst>
                 <a:ext uri="{96DAC541-7B7A-43D3-8B79-37D633B846F1}">
-                  <asvg:svgBlip xmlns:asvg="http://schemas.microsoft.com/office/drawing/2016/SVG/main" r:embed="rId3"/>
+                  <asvg:svgBlip xmlns:asvg="http://schemas.microsoft.com/office/drawing/2016/SVG/main" r:embed="rId2"/>
                 </a:ext>
               </a:extLst>
             </a:blip>
@@ -11700,10 +11718,10 @@
             <a:ext cx="810000" cy="320400"/>
           </a:xfrm>
           <a:blipFill>
-            <a:blip r:embed="rId2">
+            <a:blip>
               <a:extLst>
                 <a:ext uri="{96DAC541-7B7A-43D3-8B79-37D633B846F1}">
-                  <asvg:svgBlip xmlns:asvg="http://schemas.microsoft.com/office/drawing/2016/SVG/main" r:embed="rId3"/>
+                  <asvg:svgBlip xmlns:asvg="http://schemas.microsoft.com/office/drawing/2016/SVG/main" r:embed="rId2"/>
                 </a:ext>
               </a:extLst>
             </a:blip>
@@ -11944,7 +11962,7 @@
           <a:p>
             <a:fld id="{DE840A40-73C8-4048-8140-49F5D65BB431}" type="datetimeFigureOut">
               <a:rPr lang="et-EE" smtClean="0"/>
-              <a:t>16.03.2026</a:t>
+              <a:t>01.04.2026</a:t>
             </a:fld>
             <a:endParaRPr lang="et-EE"/>
           </a:p>
@@ -12057,10 +12075,10 @@
           <p:nvPr userDrawn="1"/>
         </p:nvPicPr>
         <p:blipFill>
-          <a:blip r:embed="rId2">
+          <a:blip>
             <a:extLst>
               <a:ext uri="{96DAC541-7B7A-43D3-8B79-37D633B846F1}">
-                <asvg:svgBlip xmlns:asvg="http://schemas.microsoft.com/office/drawing/2016/SVG/main" r:embed="rId3"/>
+                <asvg:svgBlip xmlns:asvg="http://schemas.microsoft.com/office/drawing/2016/SVG/main" r:embed="rId2"/>
               </a:ext>
             </a:extLst>
           </a:blip>
@@ -19039,10 +19057,10 @@
             <a:ext cx="2302064" cy="927536"/>
           </a:xfrm>
           <a:blipFill>
-            <a:blip r:embed="rId2">
+            <a:blip>
               <a:extLst>
                 <a:ext uri="{96DAC541-7B7A-43D3-8B79-37D633B846F1}">
-                  <asvg:svgBlip xmlns:asvg="http://schemas.microsoft.com/office/drawing/2016/SVG/main" r:embed="rId3"/>
+                  <asvg:svgBlip xmlns:asvg="http://schemas.microsoft.com/office/drawing/2016/SVG/main" r:embed="rId2"/>
                 </a:ext>
               </a:extLst>
             </a:blip>
@@ -19225,10 +19243,10 @@
           <p:nvPr userDrawn="1"/>
         </p:nvPicPr>
         <p:blipFill>
-          <a:blip r:embed="rId2">
+          <a:blip>
             <a:extLst>
               <a:ext uri="{96DAC541-7B7A-43D3-8B79-37D633B846F1}">
-                <asvg:svgBlip xmlns:asvg="http://schemas.microsoft.com/office/drawing/2016/SVG/main" r:embed="rId3"/>
+                <asvg:svgBlip xmlns:asvg="http://schemas.microsoft.com/office/drawing/2016/SVG/main" r:embed="rId2"/>
               </a:ext>
             </a:extLst>
           </a:blip>
@@ -19959,10 +19977,10 @@
           <p:nvPr userDrawn="1"/>
         </p:nvPicPr>
         <p:blipFill>
-          <a:blip r:embed="rId2">
+          <a:blip>
             <a:extLst>
               <a:ext uri="{96DAC541-7B7A-43D3-8B79-37D633B846F1}">
-                <asvg:svgBlip xmlns:asvg="http://schemas.microsoft.com/office/drawing/2016/SVG/main" r:embed="rId3"/>
+                <asvg:svgBlip xmlns:asvg="http://schemas.microsoft.com/office/drawing/2016/SVG/main" r:embed="rId2"/>
               </a:ext>
             </a:extLst>
           </a:blip>
@@ -20748,10 +20766,10 @@
             <a:ext cx="810000" cy="320400"/>
           </a:xfrm>
           <a:blipFill>
-            <a:blip r:embed="rId2">
+            <a:blip>
               <a:extLst>
                 <a:ext uri="{96DAC541-7B7A-43D3-8B79-37D633B846F1}">
-                  <asvg:svgBlip xmlns:asvg="http://schemas.microsoft.com/office/drawing/2016/SVG/main" r:embed="rId3"/>
+                  <asvg:svgBlip xmlns:asvg="http://schemas.microsoft.com/office/drawing/2016/SVG/main" r:embed="rId2"/>
                 </a:ext>
               </a:extLst>
             </a:blip>
@@ -31963,42 +31981,30 @@
               </a:buClr>
             </a:pPr>
             <a:r>
-              <a:rPr lang="en-US" sz="2000">
-                <a:ea typeface="Inter"/>
-              </a:rPr>
-              <a:t>Lae </a:t>
-            </a:r>
-            <a:r>
-              <a:rPr lang="en-US" sz="2000" err="1">
-                <a:ea typeface="Inter"/>
-              </a:rPr>
-              <a:t>alla</a:t>
-            </a:r>
-            <a:r>
-              <a:rPr lang="en-US" sz="2000">
-                <a:ea typeface="Inter"/>
-              </a:rPr>
-              <a:t> </a:t>
-            </a:r>
-            <a:r>
-              <a:rPr lang="en-US" sz="2000" err="1">
+              <a:rPr lang="en-US" sz="2000" dirty="0">
+                <a:ea typeface="Inter"/>
+              </a:rPr>
+              <a:t>Lae alla </a:t>
+            </a:r>
+            <a:r>
+              <a:rPr lang="en-US" sz="2000" dirty="0" err="1">
                 <a:ea typeface="Inter"/>
               </a:rPr>
               <a:t>alliktabel</a:t>
             </a:r>
             <a:r>
-              <a:rPr lang="en-US" sz="2000">
+              <a:rPr lang="en-US" sz="2000" dirty="0">
                 <a:ea typeface="Inter"/>
               </a:rPr>
               <a:t>: Day5 --&gt; </a:t>
             </a:r>
             <a:r>
-              <a:rPr lang="en-US" sz="2000" err="1">
+              <a:rPr lang="en-US" sz="2000" dirty="0" err="1">
                 <a:ea typeface="Inter"/>
               </a:rPr>
               <a:t>HR_dataset</a:t>
             </a:r>
-            <a:endParaRPr lang="en-US" sz="2000"/>
+            <a:endParaRPr lang="en-US" sz="2000" dirty="0"/>
           </a:p>
           <a:p>
             <a:pPr marL="514350">
@@ -32010,30 +32016,30 @@
               </a:buClr>
             </a:pPr>
             <a:r>
-              <a:rPr lang="en-US" sz="2000">
+              <a:rPr lang="en-US" sz="2000" dirty="0">
                 <a:ea typeface="Inter"/>
               </a:rPr>
               <a:t>Lae </a:t>
             </a:r>
             <a:r>
-              <a:rPr lang="en-US" sz="2000" err="1">
+              <a:rPr lang="en-US" sz="2000" dirty="0" err="1">
                 <a:ea typeface="Inter"/>
               </a:rPr>
               <a:t>üles</a:t>
             </a:r>
             <a:r>
-              <a:rPr lang="en-US" sz="2000">
+              <a:rPr lang="en-US" sz="2000" dirty="0">
                 <a:ea typeface="Inter"/>
               </a:rPr>
               <a:t> Power BI-</a:t>
             </a:r>
             <a:r>
-              <a:rPr lang="en-US" sz="2000" err="1">
+              <a:rPr lang="en-US" sz="2000" dirty="0" err="1">
                 <a:ea typeface="Inter"/>
               </a:rPr>
               <a:t>sse</a:t>
             </a:r>
-            <a:endParaRPr lang="en-US" sz="2000" err="1"/>
+            <a:endParaRPr lang="en-US" sz="2000" dirty="0"/>
           </a:p>
           <a:p>
             <a:pPr marL="514350">
@@ -32045,48 +32051,48 @@
               </a:buClr>
             </a:pPr>
             <a:r>
-              <a:rPr lang="en-US" sz="2000" err="1">
+              <a:rPr lang="en-US" sz="2000" dirty="0" err="1">
                 <a:ea typeface="Inter"/>
               </a:rPr>
               <a:t>Vaata</a:t>
             </a:r>
             <a:r>
-              <a:rPr lang="en-US" sz="2000">
+              <a:rPr lang="en-US" sz="2000" dirty="0">
                 <a:ea typeface="Inter"/>
               </a:rPr>
               <a:t> </a:t>
             </a:r>
             <a:r>
-              <a:rPr lang="en-US" sz="2000" err="1">
+              <a:rPr lang="en-US" sz="2000" dirty="0" err="1">
                 <a:ea typeface="Inter"/>
               </a:rPr>
               <a:t>üle</a:t>
             </a:r>
             <a:r>
-              <a:rPr lang="en-US" sz="2000">
+              <a:rPr lang="en-US" sz="2000" dirty="0">
                 <a:ea typeface="Inter"/>
               </a:rPr>
               <a:t> </a:t>
             </a:r>
             <a:r>
-              <a:rPr lang="en-US" sz="2000" err="1">
+              <a:rPr lang="en-US" sz="2000" dirty="0" err="1">
                 <a:ea typeface="Inter"/>
               </a:rPr>
               <a:t>tulbad</a:t>
             </a:r>
             <a:r>
-              <a:rPr lang="en-US" sz="2000">
+              <a:rPr lang="en-US" sz="2000" dirty="0">
                 <a:ea typeface="Inter"/>
               </a:rPr>
               <a:t> ja </a:t>
             </a:r>
             <a:r>
-              <a:rPr lang="en-US" sz="2000" err="1">
+              <a:rPr lang="en-US" sz="2000" dirty="0" err="1">
                 <a:ea typeface="Inter"/>
               </a:rPr>
               <a:t>vormistus</a:t>
             </a:r>
-            <a:endParaRPr lang="en-US" sz="2000" err="1"/>
+            <a:endParaRPr lang="en-US" sz="2000" dirty="0"/>
           </a:p>
           <a:p>
             <a:pPr marL="514350">
@@ -32098,48 +32104,48 @@
               </a:buClr>
             </a:pPr>
             <a:r>
-              <a:rPr lang="en-US" sz="2000">
+              <a:rPr lang="en-US" sz="2000" dirty="0">
                 <a:ea typeface="Inter"/>
               </a:rPr>
               <a:t>Mis </a:t>
             </a:r>
             <a:r>
-              <a:rPr lang="en-US" sz="2000" err="1">
+              <a:rPr lang="en-US" sz="2000" dirty="0" err="1">
                 <a:ea typeface="Inter"/>
               </a:rPr>
               <a:t>dimensioone</a:t>
             </a:r>
             <a:r>
-              <a:rPr lang="en-US" sz="2000">
+              <a:rPr lang="en-US" sz="2000" dirty="0">
                 <a:ea typeface="Inter"/>
               </a:rPr>
               <a:t> </a:t>
             </a:r>
             <a:r>
-              <a:rPr lang="en-US" sz="2000" err="1">
+              <a:rPr lang="en-US" sz="2000" dirty="0" err="1">
                 <a:ea typeface="Inter"/>
               </a:rPr>
               <a:t>vaja</a:t>
             </a:r>
             <a:r>
-              <a:rPr lang="en-US" sz="2000">
+              <a:rPr lang="en-US" sz="2000" dirty="0">
                 <a:ea typeface="Inter"/>
               </a:rPr>
               <a:t> </a:t>
             </a:r>
             <a:r>
-              <a:rPr lang="en-US" sz="2000" err="1">
+              <a:rPr lang="en-US" sz="2000" dirty="0" err="1">
                 <a:ea typeface="Inter"/>
               </a:rPr>
               <a:t>oleks</a:t>
             </a:r>
             <a:r>
-              <a:rPr lang="en-US" sz="2000">
+              <a:rPr lang="en-US" sz="2000" dirty="0">
                 <a:ea typeface="Inter"/>
               </a:rPr>
               <a:t>?</a:t>
             </a:r>
-            <a:endParaRPr lang="en-US" sz="2000"/>
+            <a:endParaRPr lang="en-US" sz="2000" dirty="0"/>
           </a:p>
           <a:p>
             <a:pPr marL="1028700" lvl="1" indent="-228600">
@@ -32150,12 +32156,12 @@
               <a:buChar char="o"/>
             </a:pPr>
             <a:r>
-              <a:rPr lang="en-US" sz="2000" err="1">
+              <a:rPr lang="en-US" sz="2000" dirty="0" err="1">
                 <a:ea typeface="Inter"/>
               </a:rPr>
               <a:t>Kalendritabel</a:t>
             </a:r>
-            <a:endParaRPr lang="en-US" sz="2000" err="1"/>
+            <a:endParaRPr lang="en-US" sz="2000" dirty="0"/>
           </a:p>
           <a:p>
             <a:pPr marL="1771650" indent="-342900">
@@ -32167,7 +32173,7 @@
               </a:buClr>
             </a:pPr>
             <a:r>
-              <a:rPr lang="en-US" sz="2000">
+              <a:rPr lang="en-US" sz="2000" dirty="0">
                 <a:solidFill>
                   <a:srgbClr val="121212"/>
                 </a:solidFill>
@@ -32187,7 +32193,7 @@
               </a:buClr>
             </a:pPr>
             <a:r>
-              <a:rPr lang="en-US" sz="2000" err="1">
+              <a:rPr lang="en-US" sz="2000" dirty="0" err="1">
                 <a:solidFill>
                   <a:srgbClr val="121212"/>
                 </a:solidFill>
@@ -32197,7 +32203,7 @@
               <a:t>DateTable</a:t>
             </a:r>
             <a:r>
-              <a:rPr lang="en-US" sz="2000">
+              <a:rPr lang="en-US" sz="2000" dirty="0">
                 <a:solidFill>
                   <a:srgbClr val="121212"/>
                 </a:solidFill>
@@ -32207,7 +32213,7 @@
               <a:t> = CALENDAR ( MIN('</a:t>
             </a:r>
             <a:r>
-              <a:rPr lang="en-US" sz="2000" err="1">
+              <a:rPr lang="en-US" sz="2000" dirty="0" err="1">
                 <a:solidFill>
                   <a:srgbClr val="121212"/>
                 </a:solidFill>
@@ -32217,7 +32223,7 @@
               <a:t>HR_dataset</a:t>
             </a:r>
             <a:r>
-              <a:rPr lang="en-US" sz="2000">
+              <a:rPr lang="en-US" sz="2000" dirty="0">
                 <a:solidFill>
                   <a:srgbClr val="121212"/>
                 </a:solidFill>
@@ -32235,7 +32241,7 @@
               <a:buFont typeface="Wingdings" panose="020B0502030000000004" pitchFamily="34" charset="0"/>
               <a:buChar char="§"/>
             </a:pPr>
-            <a:endParaRPr lang="en-US" sz="2000">
+            <a:endParaRPr lang="en-US" sz="2000" dirty="0">
               <a:solidFill>
                 <a:srgbClr val="121212"/>
               </a:solidFill>
@@ -32250,7 +32256,7 @@
               <a:buFont typeface="Wingdings" panose="020B0502030000000004" pitchFamily="34" charset="0"/>
               <a:buChar char="§"/>
             </a:pPr>
-            <a:endParaRPr lang="en-US" sz="2000"/>
+            <a:endParaRPr lang="en-US" sz="2000" dirty="0"/>
           </a:p>
           <a:p>
             <a:pPr marL="514350">
@@ -32261,7 +32267,7 @@
                 <a:srgbClr val="121212"/>
               </a:buClr>
             </a:pPr>
-            <a:endParaRPr lang="en-US" sz="2000"/>
+            <a:endParaRPr lang="en-US" sz="2000" dirty="0"/>
           </a:p>
           <a:p>
             <a:pPr marL="514350">
@@ -32272,7 +32278,7 @@
                 <a:srgbClr val="121212"/>
               </a:buClr>
             </a:pPr>
-            <a:endParaRPr lang="en-US" sz="2000"/>
+            <a:endParaRPr lang="en-US" sz="2000" dirty="0"/>
           </a:p>
         </p:txBody>
       </p:sp>
@@ -36828,9 +36834,12 @@
 </file>
 
 <file path=customXml/item1.xml><?xml version="1.0" encoding="utf-8"?>
-<p:properties xmlns:p="http://schemas.microsoft.com/office/2006/metadata/properties" xmlns:xsi="http://www.w3.org/2001/XMLSchema-instance" xmlns:pc="http://schemas.microsoft.com/office/infopath/2007/PartnerControls">
-  <documentManagement/>
-</p:properties>
+<?mso-contentType ?>
+<FormTemplates xmlns="http://schemas.microsoft.com/sharepoint/v3/contenttype/forms">
+  <Display>DocumentLibraryForm</Display>
+  <Edit>DocumentLibraryForm</Edit>
+  <New>DocumentLibraryForm</New>
+</FormTemplates>
 </file>
 
 <file path=customXml/item2.xml><?xml version="1.0" encoding="utf-8"?>
@@ -37002,19 +37011,15 @@
 </file>
 
 <file path=customXml/item3.xml><?xml version="1.0" encoding="utf-8"?>
-<?mso-contentType ?>
-<FormTemplates xmlns="http://schemas.microsoft.com/sharepoint/v3/contenttype/forms">
-  <Display>DocumentLibraryForm</Display>
-  <Edit>DocumentLibraryForm</Edit>
-  <New>DocumentLibraryForm</New>
-</FormTemplates>
+<p:properties xmlns:p="http://schemas.microsoft.com/office/2006/metadata/properties" xmlns:xsi="http://www.w3.org/2001/XMLSchema-instance" xmlns:pc="http://schemas.microsoft.com/office/infopath/2007/PartnerControls">
+  <documentManagement/>
+</p:properties>
 </file>
 
 <file path=customXml/itemProps1.xml><?xml version="1.0" encoding="utf-8"?>
-<ds:datastoreItem xmlns:ds="http://schemas.openxmlformats.org/officeDocument/2006/customXml" ds:itemID="{5BDF4908-A52A-47DD-A794-6E02D71942FC}">
+<ds:datastoreItem xmlns:ds="http://schemas.openxmlformats.org/officeDocument/2006/customXml" ds:itemID="{9DC439CA-6F1C-4005-ACA6-A52E04DEE0A7}">
   <ds:schemaRefs>
-    <ds:schemaRef ds:uri="http://schemas.microsoft.com/office/2006/metadata/properties"/>
-    <ds:schemaRef ds:uri="http://schemas.microsoft.com/office/infopath/2007/PartnerControls"/>
+    <ds:schemaRef ds:uri="http://schemas.microsoft.com/sharepoint/v3/contenttype/forms"/>
   </ds:schemaRefs>
 </ds:datastoreItem>
 </file>
@@ -37038,9 +37043,10 @@
 </file>
 
 <file path=customXml/itemProps3.xml><?xml version="1.0" encoding="utf-8"?>
-<ds:datastoreItem xmlns:ds="http://schemas.openxmlformats.org/officeDocument/2006/customXml" ds:itemID="{9DC439CA-6F1C-4005-ACA6-A52E04DEE0A7}">
+<ds:datastoreItem xmlns:ds="http://schemas.openxmlformats.org/officeDocument/2006/customXml" ds:itemID="{5BDF4908-A52A-47DD-A794-6E02D71942FC}">
   <ds:schemaRefs>
-    <ds:schemaRef ds:uri="http://schemas.microsoft.com/sharepoint/v3/contenttype/forms"/>
+    <ds:schemaRef ds:uri="http://schemas.microsoft.com/office/2006/metadata/properties"/>
+    <ds:schemaRef ds:uri="http://schemas.microsoft.com/office/infopath/2007/PartnerControls"/>
   </ds:schemaRefs>
 </ds:datastoreItem>
 </file>